--- a/site/clases/parte-1-machine-learning-clasico/083-voting-classifiers-hard-soft/clase-083-voting-classifiers-hard-soft-presentacion.pptx
+++ b/site/clases/parte-1-machine-learning-clasico/083-voting-classifiers-hard-soft/clase-083-voting-classifiers-hard-soft-presentacion.pptx
@@ -3272,7 +3272,7 @@
                 </a:solidFill>
                 <a:latin typeface="Segoe UI"/>
               </a:rPr>
-              <a:t>Parte: 1 — Machine Learning Clásico · Fuente: Géron, cap. 7.  Duración estimada: 45 min.</a:t>
+              <a:t>Parte: 1 — Machine Learning Clásico · Fuente: Géron, cap. 7.  Duración estimada: 45 min. · Nivel: Intermedio</a:t>
             </a:r>
           </a:p>
         </p:txBody>
@@ -3581,7 +3581,7 @@
                 </a:solidFill>
                 <a:latin typeface="Segoe UI"/>
               </a:rPr>
-              <a:t>Parte: 1 — Machine Learning Clásico · Fuente: Géron, cap. 7.  Duración estimada: 45 min.</a:t>
+              <a:t>Parte: 1 — Machine Learning Clásico · Fuente: Géron, cap. 7.  Duración estimada: 45 min. · Nivel: Intermedio</a:t>
             </a:r>
           </a:p>
         </p:txBody>
@@ -4932,7 +4932,273 @@
                 </a:solidFill>
                 <a:latin typeface="Courier New"/>
               </a:rPr>
-              <a:t># Imports y configuración inicial</a:t>
+              <a:t>import numpy as np</a:t>
+            </a:r>
+          </a:p>
+          <a:p>
+            <a:pPr>
+              <a:defRPr sz="1200" b="0">
+                <a:solidFill>
+                  <a:srgbClr val="F8FAFC"/>
+                </a:solidFill>
+                <a:latin typeface="Courier New"/>
+              </a:defRPr>
+            </a:pPr>
+            <a:r>
+              <a:rPr sz="1200" b="0">
+                <a:solidFill>
+                  <a:srgbClr val="F8FAFC"/>
+                </a:solidFill>
+                <a:latin typeface="Courier New"/>
+              </a:rPr>
+              <a:t>import matplotlib.pyplot as plt</a:t>
+            </a:r>
+          </a:p>
+          <a:p>
+            <a:pPr>
+              <a:defRPr sz="1200" b="0">
+                <a:solidFill>
+                  <a:srgbClr val="F8FAFC"/>
+                </a:solidFill>
+                <a:latin typeface="Courier New"/>
+              </a:defRPr>
+            </a:pPr>
+            <a:r>
+              <a:rPr sz="1200" b="0">
+                <a:solidFill>
+                  <a:srgbClr val="F8FAFC"/>
+                </a:solidFill>
+                <a:latin typeface="Courier New"/>
+              </a:rPr>
+              <a:t>from sklearn.datasets import make_moons</a:t>
+            </a:r>
+          </a:p>
+          <a:p>
+            <a:pPr>
+              <a:defRPr sz="1200" b="0">
+                <a:solidFill>
+                  <a:srgbClr val="F8FAFC"/>
+                </a:solidFill>
+                <a:latin typeface="Courier New"/>
+              </a:defRPr>
+            </a:pPr>
+            <a:r>
+              <a:rPr sz="1200" b="0">
+                <a:solidFill>
+                  <a:srgbClr val="F8FAFC"/>
+                </a:solidFill>
+                <a:latin typeface="Courier New"/>
+              </a:rPr>
+              <a:t>from sklearn.model_selection import train_test_split</a:t>
+            </a:r>
+          </a:p>
+          <a:p>
+            <a:pPr>
+              <a:defRPr sz="1200" b="0">
+                <a:solidFill>
+                  <a:srgbClr val="F8FAFC"/>
+                </a:solidFill>
+                <a:latin typeface="Courier New"/>
+              </a:defRPr>
+            </a:pPr>
+            <a:r>
+              <a:rPr sz="1200" b="0">
+                <a:solidFill>
+                  <a:srgbClr val="F8FAFC"/>
+                </a:solidFill>
+                <a:latin typeface="Courier New"/>
+              </a:rPr>
+              <a:t>from sklearn.linear_model import LogisticRegression</a:t>
+            </a:r>
+          </a:p>
+          <a:p>
+            <a:pPr>
+              <a:defRPr sz="1200" b="0">
+                <a:solidFill>
+                  <a:srgbClr val="F8FAFC"/>
+                </a:solidFill>
+                <a:latin typeface="Courier New"/>
+              </a:defRPr>
+            </a:pPr>
+            <a:r>
+              <a:rPr sz="1200" b="0">
+                <a:solidFill>
+                  <a:srgbClr val="F8FAFC"/>
+                </a:solidFill>
+                <a:latin typeface="Courier New"/>
+              </a:rPr>
+              <a:t>from sklearn.ensemble import RandomForestClassifier, VotingClassifier</a:t>
+            </a:r>
+          </a:p>
+          <a:p>
+            <a:pPr>
+              <a:defRPr sz="1200" b="0">
+                <a:solidFill>
+                  <a:srgbClr val="F8FAFC"/>
+                </a:solidFill>
+                <a:latin typeface="Courier New"/>
+              </a:defRPr>
+            </a:pPr>
+            <a:r>
+              <a:rPr sz="1200" b="0">
+                <a:solidFill>
+                  <a:srgbClr val="F8FAFC"/>
+                </a:solidFill>
+                <a:latin typeface="Courier New"/>
+              </a:rPr>
+              <a:t>from sklearn.svm import SVC</a:t>
+            </a:r>
+          </a:p>
+          <a:p>
+            <a:pPr>
+              <a:defRPr sz="1200" b="0">
+                <a:solidFill>
+                  <a:srgbClr val="F8FAFC"/>
+                </a:solidFill>
+                <a:latin typeface="Courier New"/>
+              </a:defRPr>
+            </a:pPr>
+            <a:r>
+              <a:rPr sz="1200" b="0">
+                <a:solidFill>
+                  <a:srgbClr val="F8FAFC"/>
+                </a:solidFill>
+                <a:latin typeface="Courier New"/>
+              </a:rPr>
+              <a:t>from sklearn.metrics import accuracy_score</a:t>
+            </a:r>
+          </a:p>
+          <a:p>
+            <a:pPr>
+              <a:defRPr sz="1200" b="0">
+                <a:solidFill>
+                  <a:srgbClr val="F8FAFC"/>
+                </a:solidFill>
+                <a:latin typeface="Courier New"/>
+              </a:defRPr>
+            </a:pPr>
+            <a:r>
+              <a:rPr sz="1200" b="0">
+                <a:solidFill>
+                  <a:srgbClr val="F8FAFC"/>
+                </a:solidFill>
+                <a:latin typeface="Courier New"/>
+              </a:rPr>
+              <a:t> </a:t>
+            </a:r>
+          </a:p>
+          <a:p>
+            <a:pPr>
+              <a:defRPr sz="1200" b="0">
+                <a:solidFill>
+                  <a:srgbClr val="F8FAFC"/>
+                </a:solidFill>
+                <a:latin typeface="Courier New"/>
+              </a:defRPr>
+            </a:pPr>
+            <a:r>
+              <a:rPr sz="1200" b="0">
+                <a:solidFill>
+                  <a:srgbClr val="F8FAFC"/>
+                </a:solidFill>
+                <a:latin typeface="Courier New"/>
+              </a:rPr>
+              <a:t>np.random.seed(42)</a:t>
+            </a:r>
+          </a:p>
+          <a:p>
+            <a:pPr>
+              <a:defRPr sz="1200" b="0">
+                <a:solidFill>
+                  <a:srgbClr val="F8FAFC"/>
+                </a:solidFill>
+                <a:latin typeface="Courier New"/>
+              </a:defRPr>
+            </a:pPr>
+            <a:r>
+              <a:rPr sz="1200" b="0">
+                <a:solidFill>
+                  <a:srgbClr val="F8FAFC"/>
+                </a:solidFill>
+                <a:latin typeface="Courier New"/>
+              </a:rPr>
+              <a:t> </a:t>
+            </a:r>
+          </a:p>
+          <a:p>
+            <a:pPr>
+              <a:defRPr sz="1200" b="0">
+                <a:solidFill>
+                  <a:srgbClr val="F8FAFC"/>
+                </a:solidFill>
+                <a:latin typeface="Courier New"/>
+              </a:defRPr>
+            </a:pPr>
+            <a:r>
+              <a:rPr sz="1200" b="0">
+                <a:solidFill>
+                  <a:srgbClr val="F8FAFC"/>
+                </a:solidFill>
+                <a:latin typeface="Courier New"/>
+              </a:rPr>
+              <a:t>X, y = make_moons(n_samples=500, noise=0.30, random_state=42)</a:t>
+            </a:r>
+          </a:p>
+          <a:p>
+            <a:pPr>
+              <a:defRPr sz="1200" b="0">
+                <a:solidFill>
+                  <a:srgbClr val="F8FAFC"/>
+                </a:solidFill>
+                <a:latin typeface="Courier New"/>
+              </a:defRPr>
+            </a:pPr>
+            <a:r>
+              <a:rPr sz="1200" b="0">
+                <a:solidFill>
+                  <a:srgbClr val="F8FAFC"/>
+                </a:solidFill>
+                <a:latin typeface="Courier New"/>
+              </a:rPr>
+              <a:t>X_train, X_test, y_train, y_test = train_test_split(</a:t>
+            </a:r>
+          </a:p>
+          <a:p>
+            <a:pPr>
+              <a:defRPr sz="1200" b="0">
+                <a:solidFill>
+                  <a:srgbClr val="F8FAFC"/>
+                </a:solidFill>
+                <a:latin typeface="Courier New"/>
+              </a:defRPr>
+            </a:pPr>
+            <a:r>
+              <a:rPr sz="1200" b="0">
+                <a:solidFill>
+                  <a:srgbClr val="F8FAFC"/>
+                </a:solidFill>
+                <a:latin typeface="Courier New"/>
+              </a:rPr>
+              <a:t>    X, y, test_size=0.2, random_state=42, stratify=y)</a:t>
+            </a:r>
+          </a:p>
+          <a:p>
+            <a:pPr>
+              <a:defRPr sz="1200" b="0">
+                <a:solidFill>
+                  <a:srgbClr val="F8FAFC"/>
+                </a:solidFill>
+                <a:latin typeface="Courier New"/>
+              </a:defRPr>
+            </a:pPr>
+            <a:r>
+              <a:rPr sz="1200" b="0">
+                <a:solidFill>
+                  <a:srgbClr val="F8FAFC"/>
+                </a:solidFill>
+                <a:latin typeface="Courier New"/>
+              </a:rPr>
+              <a:t>print('train', X_train.shape, 'test', X_test.shape)</a:t>
             </a:r>
           </a:p>
         </p:txBody>
